--- a/presentations/b07-pki-technical/B07_PKI_Technical.pptx
+++ b/presentations/b07-pki-technical/B07_PKI_Technical.pptx
@@ -141,14 +141,14 @@
   <p:extLst>
     <p:ext uri="{521415D9-36F7-43E2-AB2F-B90AF26B5E84}">
       <p14:sectionLst xmlns:p14="http://schemas.microsoft.com/office/powerpoint/2010/main">
-        <p14:section name="Orientation" id="{3284c359-5594-e741-728d-5424e825c069}">
+        <p14:section name="Orientation" id="{f075aedb-44e5-31de-d857-361805c507c4}">
           <p14:sldIdLst>
             <p14:sldId id="256"/>
             <p14:sldId id="257"/>
             <p14:sldId id="258"/>
           </p14:sldIdLst>
         </p14:section>
-        <p14:section name="Part 1 — Hardening and the target" id="{b99a2f21-6c4b-df6f-3e90-1f943d0cbf53}">
+        <p14:section name="Part 1 — Hardening and the target" id="{4017a7b9-319c-f0ac-561f-b7f71926fbcf}">
           <p14:sldIdLst>
             <p14:sldId id="259"/>
             <p14:sldId id="260"/>
@@ -165,7 +165,7 @@
             <p14:sldId id="271"/>
           </p14:sldIdLst>
         </p14:section>
-        <p14:section name="Part 2 — Issuing, migrating and retiring" id="{1d7f0786-ceb8-02a2-ab51-f1cd4861baf8}">
+        <p14:section name="Part 2 — Issuing, migrating and retiring" id="{8a6f656b-132e-f1c6-81bf-79a2650d3783}">
           <p14:sldIdLst>
             <p14:sldId id="272"/>
             <p14:sldId id="273"/>
@@ -183,7 +183,7 @@
             <p14:sldId id="285"/>
           </p14:sldIdLst>
         </p14:section>
-        <p14:section name="Backup" id="{5eb87bc5-2624-89aa-834f-404fe7d73997}">
+        <p14:section name="Backup" id="{2f7e1281-b62e-510a-a464-4a1e1df6e2f6}">
           <p14:sldIdLst>
             <p14:sldId id="286"/>
             <p14:sldId id="287"/>
@@ -2513,9 +2513,9 @@
           <a:p>
             <a:r>
               <a:rPr lang="en-US" dirty="0"/>
-              <a:t>[47:20–49:25]  Migration ends on a date; certificates don't. Public TLS validity falls to forty-seven days from March 15, 2029. The schedule binds publicly trusted certificates, but the program aligns internal lifetimes with it as automation proves itself. The design rule: no certificate class may depend on a person remembering a date. The target has three renewal engines.
+              <a:t>[47:20–49:27]  Migration ends on a date; certificates don't. Public TLS validity falls to forty-seven days from March 15, 2029. The schedule binds publicly trusted certificates, but the program aligns internal lifetimes with it as automation proves itself. The design rule: no certificate class may depend on a person remembering a date. The target has three renewal engines.
 Intune profiles renew certificates on managed devices at the profile's renewal threshold, with a new key pair for SCEP. On Apple platforms, renewal happens only inside the threshold window with the device unlocked, and a failed renewal leaves the expired certificate in place without a retry. AD CS autoenrollment renews domain controller certificates, which also serve LDAPS, so the CA must stay online and its CRL current. And CyberArk Certificate Manager discovers, tracks and renews server TLS, including NPS and RADIUS servers, appliances, public TLS and network devices, with a Server Owner on every certificate.
-Neither Microsoft issuer in the target offers ACME, so the program provides it through the lifecycle platform. CyberArk documents the http-01 and dns-01 challenges. One federal limit: win-acme requires FIPS mode to be disabled on the CyberArk server, so where FIPS mode is required, use another tested client.
+Neither Microsoft issuer in the target offers ACME, so the program provides it through the lifecycle platform. CyberArk documents the http-01 and dns-01 challenges. One federal limit: CyberArk's installation guide says FIPS mode isn't supported for its ACME service at all, so run the ACME service on dedicated servers outside the FIPS-mode server set.
 The drift checks run at least weekly and are committed to the evidence repository, because an assessor asks how long a finding stayed open. Watch for certificates within two renewal windows of expiry with no engine bound, issuance outside policy, missing strong mapping, trust store anchors that aren't approved, stale CRLs, and posture regressions. And treat a SID mismatch as a security event: it can mean the certificate was issued to a different user. That's event 41 on current domain controllers, but event 49 on Server 2008 and 2008 R2, where 41 means no strong mapping.
 Workbook: Book 07, Chapter 08 — Lifecycle, Monitoring and Decommissioning, "Renewal at scale," "ACME where it applies," "Monitoring," "Compliance and drift detection."</a:t>
             </a:r>
@@ -2696,7 +2696,7 @@
           <a:p>
             <a:r>
               <a:rPr lang="en-US" dirty="0"/>
-              <a:t>[49:25–51:24]  Last, retiring AD CS, which is the program's sixth wave. It applies only to the CAs and role services that no longer serve a retained class; domain controller, LDAPS and RADIUS certificates usually keep at least one issuing CA alive for as long as domain controllers exist. The gate: cutover complete, the thirty-day rollback window passed with no incidents, and every retained class running on the CAs that remain.
+              <a:t>[49:27–51:26]  Last, retiring AD CS, which is the program's sixth wave. It applies only to the CAs and role services that no longer serve a retained class; domain controller, LDAPS and RADIUS certificates usually keep at least one issuing CA alive for as long as domain controllers exist. The gate: cutover complete, the thirty-day rollback window passed with no incidents, and every retained class running on the CAs that remain.
 Confirm nothing depends on the CA, using the lifecycle inventory and the CA database. Stop new issuance: remove the templates, unlink autoenrollment, deny pending requests. Back up the database and key, with the backup and its password through separate channels. Revoke outstanding certificates for cessation of operation, set the CRL lifetime past the remaining certificates' lifetime, and publish. Remove NDES and the web services before the CA, and move any OCSP consumers to CRL checking. Clean up trust in Entra, Intune, Group Policy, NTAuth and the lifecycle platform. Keep the CDP and AIA endpoints serving until the last certificate expires, delete templates only after every CA in the forest is gone, and commit a decommission record. Under BYOCA, the root and any CA that signed the Cloud PKI issuing CA stay.
 The assessor reads NIST SP 800-53 evidence: key storage and binding settings for IA-5 enhancement two, the trust store and CRL configuration for path validation, HSM key protection for SC-12, and the certificate policy and approved trust anchors for SC-17.
 So, from Monday: harden first and gate on it, choose the root deliberately, issue strongly mapped certificates, run both PKIs with reachable CRLs, and retire AD CS last, with evidence. Chapters 03 through 08 and the appendices carry the detail. Thank you.
@@ -31146,7 +31146,7 @@
                   <a:schemeClr val="tx2"/>
                 </a:solidFill>
               </a:rPr>
-              <a:t>win-acme needs FIPS mode off</a:t>
+              <a:t>ACME service: FIPS mode off</a:t>
             </a:r>
             <a:endParaRPr lang="en-US" sz="1400" dirty="0"/>
           </a:p>
